--- a/builder/assets/reference-pages/region-map-table.pptx
+++ b/builder/assets/reference-pages/region-map-table.pptx
@@ -1097,7 +1097,7 @@
                   <a:srgbClr val="15375F"/>
                 </a:solidFill>
               </a:rPr>
-              <a:t>70% 的人力成本集中在三个高成本区域，但产出贡献仅占 49%</a:t>
+              <a:t>70% The labor costs are concentrated in three high-cost areas, but the output contribution only accounts for 49%</a:t>
             </a:r>
           </a:p>
         </p:txBody>
@@ -1315,7 +1315,7 @@
                   <a:srgbClr val="15375F"/>
                 </a:solidFill>
               </a:rPr>
-              <a:t>华东</a:t>
+              <a:t>East China</a:t>
             </a:r>
           </a:p>
         </p:txBody>
@@ -1419,7 +1419,7 @@
                   <a:srgbClr val="15375F"/>
                 </a:solidFill>
               </a:rPr>
-              <a:t>华北</a:t>
+              <a:t>North China</a:t>
             </a:r>
           </a:p>
         </p:txBody>
@@ -1523,7 +1523,7 @@
                   <a:srgbClr val="15375F"/>
                 </a:solidFill>
               </a:rPr>
-              <a:t>华南</a:t>
+              <a:t>South China</a:t>
             </a:r>
           </a:p>
         </p:txBody>
@@ -1627,7 +1627,7 @@
                   <a:srgbClr val="15375F"/>
                 </a:solidFill>
               </a:rPr>
-              <a:t>华中</a:t>
+              <a:t>Central China</a:t>
             </a:r>
           </a:p>
         </p:txBody>
@@ -1731,7 +1731,7 @@
                   <a:srgbClr val="15375F"/>
                 </a:solidFill>
               </a:rPr>
-              <a:t>西部</a:t>
+              <a:t>west</a:t>
             </a:r>
           </a:p>
         </p:txBody>
@@ -1835,7 +1835,7 @@
                   <a:srgbClr val="15375F"/>
                 </a:solidFill>
               </a:rPr>
-              <a:t>东北</a:t>
+              <a:t>Northeast</a:t>
             </a:r>
           </a:p>
         </p:txBody>
@@ -1889,7 +1889,7 @@
                   <a:srgbClr val="15375F"/>
                 </a:solidFill>
               </a:rPr>
-              <a:t>区域｜人数｜成本｜产出｜人效</a:t>
+              <a:t>area｜Number of people｜cost｜output｜Human efficiency</a:t>
             </a:r>
           </a:p>
         </p:txBody>
@@ -1943,7 +1943,7 @@
                   <a:srgbClr val="E8872D"/>
                 </a:solidFill>
               </a:rPr>
-              <a:t>华东｜620｜28%｜20%｜92</a:t>
+              <a:t>East China｜620｜28%｜20%｜92</a:t>
             </a:r>
           </a:p>
         </p:txBody>
@@ -1997,7 +1997,7 @@
                   <a:srgbClr val="E8872D"/>
                 </a:solidFill>
               </a:rPr>
-              <a:t>华北｜510｜24%｜17%｜88</a:t>
+              <a:t>North China｜510｜24%｜17%｜88</a:t>
             </a:r>
           </a:p>
         </p:txBody>
@@ -2051,7 +2051,7 @@
                   <a:srgbClr val="E8872D"/>
                 </a:solidFill>
               </a:rPr>
-              <a:t>华南｜450｜18%｜12%｜96</a:t>
+              <a:t>South China｜450｜18%｜12%｜96</a:t>
             </a:r>
           </a:p>
         </p:txBody>
@@ -2105,7 +2105,7 @@
                   <a:srgbClr val="172033"/>
                 </a:solidFill>
               </a:rPr>
-              <a:t>华中｜260｜11%｜17%｜112</a:t>
+              <a:t>Central China｜260｜11%｜17%｜112</a:t>
             </a:r>
           </a:p>
         </p:txBody>
@@ -2159,7 +2159,7 @@
                   <a:srgbClr val="172033"/>
                 </a:solidFill>
               </a:rPr>
-              <a:t>西部｜180｜9%｜14%｜118</a:t>
+              <a:t>west｜180｜9%｜14%｜118</a:t>
             </a:r>
           </a:p>
         </p:txBody>
@@ -2213,14 +2213,14 @@
                   <a:srgbClr val="172033"/>
                 </a:solidFill>
               </a:rPr>
-              <a:t>东北｜130｜6%｜8%｜101</a:t>
+              <a:t>Northeast｜130｜6%｜8%｜101</a:t>
             </a:r>
           </a:p>
         </p:txBody>
       </p:sp>
       <p:sp>
         <p:nvSpPr>
-          <p:cNvPr id="26" name="关键洞察-rail">
+          <p:cNvPr id="26" name="key insights-rail">
             <a:extLst xmlns:a="http://schemas.openxmlformats.org/drawingml/2006/main">
               <a:ext uri="{FF2B5EF4-FFF2-40B4-BE49-F238E27FC236}">
                 <a16:creationId xmlns:a16="http://schemas.microsoft.com/office/drawing/2014/main" id="{9D6366BF-37D4-433F-9099-E29E64AA42E9}"/>
@@ -2255,7 +2255,7 @@
       </p:sp>
       <p:sp>
         <p:nvSpPr>
-          <p:cNvPr id="27" name="关键洞察-title">
+          <p:cNvPr id="27" name="key insights-title">
             <a:extLst xmlns:a="http://schemas.openxmlformats.org/drawingml/2006/main">
               <a:ext uri="{FF2B5EF4-FFF2-40B4-BE49-F238E27FC236}">
                 <a16:creationId xmlns:a16="http://schemas.microsoft.com/office/drawing/2014/main" id="{8BFCCDE0-CE8A-4DCD-A5D7-97A4C43951BC}"/>
@@ -2298,14 +2298,14 @@
                   <a:srgbClr val="15375F"/>
                 </a:solidFill>
               </a:rPr>
-              <a:t>关键洞察</a:t>
+              <a:t>key insights</a:t>
             </a:r>
           </a:p>
         </p:txBody>
       </p:sp>
       <p:sp>
         <p:nvSpPr>
-          <p:cNvPr id="28" name="关键洞察-1">
+          <p:cNvPr id="28" name="key insights-1">
             <a:extLst xmlns:a="http://schemas.openxmlformats.org/drawingml/2006/main">
               <a:ext uri="{FF2B5EF4-FFF2-40B4-BE49-F238E27FC236}">
                 <a16:creationId xmlns:a16="http://schemas.microsoft.com/office/drawing/2014/main" id="{967EC988-DF8C-46E2-9961-EE2868C3FACE}"/>
@@ -2354,14 +2354,14 @@
                   <a:srgbClr val="172033"/>
                 </a:solidFill>
               </a:rPr>
-              <a:t>华东、华北、华南成本占比合计 70%</a:t>
+              <a:t>Total cost proportion of East China, North China, and South China 70%</a:t>
             </a:r>
           </a:p>
         </p:txBody>
       </p:sp>
       <p:sp>
         <p:nvSpPr>
-          <p:cNvPr id="29" name="关键洞察-2">
+          <p:cNvPr id="29" name="key insights-2">
             <a:extLst xmlns:a="http://schemas.openxmlformats.org/drawingml/2006/main">
               <a:ext uri="{FF2B5EF4-FFF2-40B4-BE49-F238E27FC236}">
                 <a16:creationId xmlns:a16="http://schemas.microsoft.com/office/drawing/2014/main" id="{DE8396A6-1ED5-4154-8964-A0CF3C502B0B}"/>
@@ -2410,14 +2410,14 @@
                   <a:srgbClr val="172033"/>
                 </a:solidFill>
               </a:rPr>
-              <a:t>三地人效指数均低于全国均值 100</a:t>
+              <a:t>The human efficiency index of the three places is lower than the national average 100</a:t>
             </a:r>
           </a:p>
         </p:txBody>
       </p:sp>
       <p:sp>
         <p:nvSpPr>
-          <p:cNvPr id="30" name="关键洞察-3">
+          <p:cNvPr id="30" name="key insights-3">
             <a:extLst xmlns:a="http://schemas.openxmlformats.org/drawingml/2006/main">
               <a:ext uri="{FF2B5EF4-FFF2-40B4-BE49-F238E27FC236}">
                 <a16:creationId xmlns:a16="http://schemas.microsoft.com/office/drawing/2014/main" id="{A77CF4DA-59D5-4B79-B935-0B28EEA36C19}"/>
@@ -2466,7 +2466,7 @@
                   <a:srgbClr val="172033"/>
                 </a:solidFill>
               </a:rPr>
-              <a:t>中西部人效高且仍有承接空间</a:t>
+              <a:t>The central and western regions are highly efficient and there is still room for undertaking</a:t>
             </a:r>
           </a:p>
         </p:txBody>
@@ -2522,7 +2522,7 @@
                   <a:srgbClr val="15375F"/>
                 </a:solidFill>
               </a:rPr>
-              <a:t>新增产能优先投向华中与西部，沿海三区实行结构性控编</a:t>
+              <a:t>New production capacity will be given priority to central and western China, and structural control will be implemented in the three coastal areas.</a:t>
             </a:r>
           </a:p>
         </p:txBody>
